--- a/decision-doc/decision-doc.pptx
+++ b/decision-doc/decision-doc.pptx
@@ -10616,6 +10616,207 @@
           </a:p>
         </p:txBody>
       </p:sp>
+      <p:sp>
+        <p:nvSpPr>
+          <p:cNvPr id="6" name="Text 4"/>
+          <p:cNvSpPr/>
+          <p:nvPr/>
+        </p:nvSpPr>
+        <p:spPr>
+          <a:xfrm>
+            <a:off x="548640" y="2523744"/>
+            <a:ext cx="11091672" cy="312039"/>
+          </a:xfrm>
+          <a:prstGeom prst="rect">
+            <a:avLst/>
+          </a:prstGeom>
+          <a:noFill/>
+          <a:ln/>
+        </p:spPr>
+        <p:txBody>
+          <a:bodyPr wrap="square" rtlCol="0" anchor="t">
+            <a:normAutofit/>
+          </a:bodyPr>
+          <a:lstStyle/>
+          <a:p>
+            <a:pPr indent="0" marL="0">
+              <a:lnSpc>
+                <a:spcPct val="108000"/>
+              </a:lnSpc>
+              <a:spcAft>
+                <a:spcPts val="200"/>
+              </a:spcAft>
+              <a:buNone/>
+            </a:pPr>
+            <a:r>
+              <a:rPr lang="en-US" sz="1350" b="1" dirty="0">
+                <a:solidFill>
+                  <a:srgbClr val="3F6B5F"/>
+                </a:solidFill>
+                <a:latin typeface="Malgun Gothic" pitchFamily="34" charset="0"/>
+                <a:ea typeface="Malgun Gothic" pitchFamily="34" charset="-122"/>
+                <a:cs typeface="Malgun Gothic" pitchFamily="34" charset="-120"/>
+              </a:rPr>
+              <a:t>데이터</a:t>
+            </a:r>
+            <a:pPr indent="0" marL="0">
+              <a:lnSpc>
+                <a:spcPct val="108000"/>
+              </a:lnSpc>
+              <a:spcAft>
+                <a:spcPts val="200"/>
+              </a:spcAft>
+              <a:buNone/>
+            </a:pPr>
+            <a:r>
+              <a:rPr lang="en-US" sz="1350" dirty="0">
+                <a:solidFill>
+                  <a:srgbClr val="6B6357"/>
+                </a:solidFill>
+                <a:latin typeface="Malgun Gothic" pitchFamily="34" charset="0"/>
+                <a:ea typeface="Malgun Gothic" pitchFamily="34" charset="-122"/>
+                <a:cs typeface="Malgun Gothic" pitchFamily="34" charset="-120"/>
+              </a:rPr>
+              <a:t> · 이 문장이 밖으로 나가도 되는가, 나간 뒤 어디에 얼마나 남는가</a:t>
+            </a:r>
+            <a:endParaRPr lang="en-US" sz="1350" dirty="0"/>
+          </a:p>
+        </p:txBody>
+      </p:sp>
+      <p:sp>
+        <p:nvSpPr>
+          <p:cNvPr id="7" name="Text 5"/>
+          <p:cNvSpPr/>
+          <p:nvPr/>
+        </p:nvSpPr>
+        <p:spPr>
+          <a:xfrm>
+            <a:off x="548640" y="2982087"/>
+            <a:ext cx="11091672" cy="312039"/>
+          </a:xfrm>
+          <a:prstGeom prst="rect">
+            <a:avLst/>
+          </a:prstGeom>
+          <a:noFill/>
+          <a:ln/>
+        </p:spPr>
+        <p:txBody>
+          <a:bodyPr wrap="square" rtlCol="0" anchor="t">
+            <a:normAutofit/>
+          </a:bodyPr>
+          <a:lstStyle/>
+          <a:p>
+            <a:pPr indent="0" marL="0">
+              <a:lnSpc>
+                <a:spcPct val="108000"/>
+              </a:lnSpc>
+              <a:spcAft>
+                <a:spcPts val="200"/>
+              </a:spcAft>
+              <a:buNone/>
+            </a:pPr>
+            <a:r>
+              <a:rPr lang="en-US" sz="1350" b="1" dirty="0">
+                <a:solidFill>
+                  <a:srgbClr val="3A5A8C"/>
+                </a:solidFill>
+                <a:latin typeface="Malgun Gothic" pitchFamily="34" charset="0"/>
+                <a:ea typeface="Malgun Gothic" pitchFamily="34" charset="-122"/>
+                <a:cs typeface="Malgun Gothic" pitchFamily="34" charset="-120"/>
+              </a:rPr>
+              <a:t>비용</a:t>
+            </a:r>
+            <a:pPr indent="0" marL="0">
+              <a:lnSpc>
+                <a:spcPct val="108000"/>
+              </a:lnSpc>
+              <a:spcAft>
+                <a:spcPts val="200"/>
+              </a:spcAft>
+              <a:buNone/>
+            </a:pPr>
+            <a:r>
+              <a:rPr lang="en-US" sz="1350" dirty="0">
+                <a:solidFill>
+                  <a:srgbClr val="6B6357"/>
+                </a:solidFill>
+                <a:latin typeface="Malgun Gothic" pitchFamily="34" charset="0"/>
+                <a:ea typeface="Malgun Gothic" pitchFamily="34" charset="-122"/>
+                <a:cs typeface="Malgun Gothic" pitchFamily="34" charset="-120"/>
+              </a:rPr>
+              <a:t> · 같은 일을 한 달 반복하면 어느 쪽이 싸고, 가장 큰 항목은 무엇인가</a:t>
+            </a:r>
+            <a:endParaRPr lang="en-US" sz="1350" dirty="0"/>
+          </a:p>
+        </p:txBody>
+      </p:sp>
+      <p:sp>
+        <p:nvSpPr>
+          <p:cNvPr id="8" name="Text 6"/>
+          <p:cNvSpPr/>
+          <p:nvPr/>
+        </p:nvSpPr>
+        <p:spPr>
+          <a:xfrm>
+            <a:off x="548640" y="3440430"/>
+            <a:ext cx="11091672" cy="312039"/>
+          </a:xfrm>
+          <a:prstGeom prst="rect">
+            <a:avLst/>
+          </a:prstGeom>
+          <a:noFill/>
+          <a:ln/>
+        </p:spPr>
+        <p:txBody>
+          <a:bodyPr wrap="square" rtlCol="0" anchor="t">
+            <a:normAutofit/>
+          </a:bodyPr>
+          <a:lstStyle/>
+          <a:p>
+            <a:pPr indent="0" marL="0">
+              <a:lnSpc>
+                <a:spcPct val="108000"/>
+              </a:lnSpc>
+              <a:spcAft>
+                <a:spcPts val="200"/>
+              </a:spcAft>
+              <a:buNone/>
+            </a:pPr>
+            <a:r>
+              <a:rPr lang="en-US" sz="1350" b="1" dirty="0">
+                <a:solidFill>
+                  <a:srgbClr val="A65A3F"/>
+                </a:solidFill>
+                <a:latin typeface="Malgun Gothic" pitchFamily="34" charset="0"/>
+                <a:ea typeface="Malgun Gothic" pitchFamily="34" charset="-122"/>
+                <a:cs typeface="Malgun Gothic" pitchFamily="34" charset="-120"/>
+              </a:rPr>
+              <a:t>주권</a:t>
+            </a:r>
+            <a:pPr indent="0" marL="0">
+              <a:lnSpc>
+                <a:spcPct val="108000"/>
+              </a:lnSpc>
+              <a:spcAft>
+                <a:spcPts val="200"/>
+              </a:spcAft>
+              <a:buNone/>
+            </a:pPr>
+            <a:r>
+              <a:rPr lang="en-US" sz="1350" dirty="0">
+                <a:solidFill>
+                  <a:srgbClr val="6B6357"/>
+                </a:solidFill>
+                <a:latin typeface="Malgun Gothic" pitchFamily="34" charset="0"/>
+                <a:ea typeface="Malgun Gothic" pitchFamily="34" charset="-122"/>
+                <a:cs typeface="Malgun Gothic" pitchFamily="34" charset="-120"/>
+              </a:rPr>
+              <a:t> · 상대가 바꾸거나 멈췄을 때 나는 무엇을 할 수 있는가</a:t>
+            </a:r>
+            <a:endParaRPr lang="en-US" sz="1350" dirty="0"/>
+          </a:p>
+        </p:txBody>
+      </p:sp>
     </p:spTree>
   </p:cSld>
   <p:clrMapOvr>
